--- a/examples/caldergate/01 Templates & Budget/Management Pack Template.pptx
+++ b/examples/caldergate/01 Templates & Budget/Management Pack Template.pptx
@@ -3146,7 +3146,7 @@
               </a:defRPr>
             </a:pPr>
             <a:r>
-              <a:t>DRAFT — built by close-pack skills from reviewer-signed figures only</a:t>
+              <a:t>DRAFT — built by the verified-close plugin from reviewer-signed figures only</a:t>
             </a:r>
           </a:p>
           <a:p>
